--- a/media/resources/files/EkiOrunduuOnduktar_Boluu_XandO.pptx
+++ b/media/resources/files/EkiOrunduuOnduktar_Boluu_XandO.pptx
@@ -8571,7 +8571,7 @@
                 <a:ea typeface="+mn-ea"/>
                 <a:cs typeface="+mn-cs"/>
               </a:rPr>
-              <a:t>Турдуу пикирлер учун ыраазычылык билдиребиз.</a:t>
+              <a:t>Түрдүү пикирлер үчүн ыраазычылык билдиребиз.</a:t>
             </a:r>
           </a:p>
           <a:p>

--- a/media/resources/files/EkiOrunduuOnduktar_Boluu_XandO.pptx
+++ b/media/resources/files/EkiOrunduuOnduktar_Boluu_XandO.pptx
@@ -3952,7 +3952,7 @@
                 <a:ea typeface="+mn-ea"/>
                 <a:cs typeface="Arial" panose="020B0604020202020204" pitchFamily="34" charset="0"/>
               </a:rPr>
-              <a:t>Мугалим үчүн жооп баракчасы жана таратма материалдар камтылган.</a:t>
+              <a:t>Мугалим үчүн жооп барагы жана таратма материалдар бар.</a:t>
             </a:r>
           </a:p>
           <a:p>
@@ -4021,7 +4021,7 @@
                 <a:ea typeface="+mn-ea"/>
                 <a:cs typeface="Arial" panose="020B0604020202020204" pitchFamily="34" charset="0"/>
               </a:rPr>
-              <a:t>Кайсы команда туура жооп бергенине жараша '</a:t>
+              <a:t>Туура жооп берген командага жараша «</a:t>
             </a:r>
             <a:r>
               <a:rPr kumimoji="0" lang="en-GB" sz="2000" b="0" i="0" u="sng" strike="noStrike" kern="1200" cap="none" spc="0" normalizeH="0" baseline="0" noProof="0" dirty="0">
@@ -4038,7 +4038,7 @@
                 <a:ea typeface="+mn-ea"/>
                 <a:cs typeface="Arial" panose="020B0604020202020204" pitchFamily="34" charset="0"/>
               </a:rPr>
-              <a:t>X' </a:t>
+              <a:t>X» </a:t>
             </a:r>
             <a:r>
               <a:rPr kumimoji="0" lang="ru-RU" sz="2000" b="0" i="0" u="sng" strike="noStrike" kern="1200" cap="none" spc="0" normalizeH="0" baseline="0" noProof="0" dirty="0">
@@ -4055,7 +4055,7 @@
                 <a:ea typeface="+mn-ea"/>
                 <a:cs typeface="Arial" panose="020B0604020202020204" pitchFamily="34" charset="0"/>
               </a:rPr>
-              <a:t>же '</a:t>
+              <a:t>же «</a:t>
             </a:r>
             <a:r>
               <a:rPr kumimoji="0" lang="en-GB" sz="2000" b="0" i="0" u="sng" strike="noStrike" kern="1200" cap="none" spc="0" normalizeH="0" baseline="0" noProof="0" dirty="0">
@@ -4072,7 +4072,7 @@
                 <a:ea typeface="+mn-ea"/>
                 <a:cs typeface="Arial" panose="020B0604020202020204" pitchFamily="34" charset="0"/>
               </a:rPr>
-              <a:t>O' </a:t>
+              <a:t>O» </a:t>
             </a:r>
             <a:r>
               <a:rPr kumimoji="0" lang="ru-RU" sz="2000" b="0" i="0" u="sng" strike="noStrike" kern="1200" cap="none" spc="0" normalizeH="0" baseline="0" noProof="0" dirty="0">
@@ -4089,7 +4089,7 @@
                 <a:ea typeface="+mn-ea"/>
                 <a:cs typeface="Arial" panose="020B0604020202020204" pitchFamily="34" charset="0"/>
               </a:rPr>
-              <a:t>баскычын басыңыз/тийип коюңуз</a:t>
+              <a:t>баскычын басыңыз</a:t>
             </a:r>
             <a:r>
               <a:rPr kumimoji="0" lang="en-GB" sz="2000" b="0" i="0" u="none" strike="noStrike" kern="1200" cap="none" spc="0" normalizeH="0" baseline="0" noProof="0" dirty="0">
@@ -4720,7 +4720,7 @@
             <a:pPr algn="ctr"/>
             <a:r>
               <a:rPr lang="en-GB" sz="4400" dirty="0"/>
-              <a:t>12 ÷ 0.6</a:t>
+              <a:t>12 ÷ 0,6</a:t>
             </a:r>
           </a:p>
         </p:txBody>
@@ -4761,7 +4761,7 @@
             <a:pPr algn="ctr"/>
             <a:r>
               <a:rPr lang="en-GB" sz="4400" dirty="0"/>
-              <a:t>4.68 ÷ 0.18</a:t>
+              <a:t>4,68 ÷ 0,18</a:t>
             </a:r>
           </a:p>
         </p:txBody>
@@ -4802,7 +4802,7 @@
             <a:pPr algn="ctr"/>
             <a:r>
               <a:rPr lang="en-GB" sz="4400" dirty="0"/>
-              <a:t>2 ÷ 0.05</a:t>
+              <a:t>2 ÷ 0,05</a:t>
             </a:r>
           </a:p>
         </p:txBody>
@@ -4843,7 +4843,7 @@
             <a:pPr algn="ctr"/>
             <a:r>
               <a:rPr lang="en-GB" sz="4400" dirty="0"/>
-              <a:t>57.2 ÷ 1.1</a:t>
+              <a:t>57,2 ÷ 1,1</a:t>
             </a:r>
           </a:p>
         </p:txBody>
@@ -4884,11 +4884,11 @@
             <a:pPr algn="ctr"/>
             <a:r>
               <a:rPr lang="en-GB" sz="4400"/>
-              <a:t>1.56 </a:t>
+              <a:t>1,56 </a:t>
             </a:r>
             <a:r>
               <a:rPr lang="en-GB" sz="4400" dirty="0"/>
-              <a:t>÷ 0.24</a:t>
+              <a:t>÷ 0,24</a:t>
             </a:r>
           </a:p>
         </p:txBody>
@@ -4929,7 +4929,7 @@
             <a:pPr algn="ctr"/>
             <a:r>
               <a:rPr lang="en-GB" sz="4400" dirty="0"/>
-              <a:t>40.3 ÷ 1.3</a:t>
+              <a:t>40,3 ÷ 1,3</a:t>
             </a:r>
           </a:p>
         </p:txBody>
@@ -4970,7 +4970,7 @@
             <a:pPr algn="ctr"/>
             <a:r>
               <a:rPr lang="en-GB" sz="4400" dirty="0"/>
-              <a:t>0.6 ÷ 0.12</a:t>
+              <a:t>0,6 ÷ 0,12</a:t>
             </a:r>
           </a:p>
         </p:txBody>
@@ -5011,7 +5011,7 @@
             <a:pPr algn="ctr"/>
             <a:r>
               <a:rPr lang="en-GB" sz="4400" dirty="0"/>
-              <a:t>3.72 ÷ 0.31</a:t>
+              <a:t>3,72 ÷ 0,31</a:t>
             </a:r>
           </a:p>
         </p:txBody>
@@ -5052,7 +5052,7 @@
             <a:pPr algn="ctr"/>
             <a:r>
               <a:rPr lang="en-GB" sz="4400" dirty="0"/>
-              <a:t>6.4 ÷ 4</a:t>
+              <a:t>6,4 ÷ 4</a:t>
             </a:r>
           </a:p>
         </p:txBody>
